--- a/SQLTUNING/SQL튜닝_Ch14_교안.pptx
+++ b/SQLTUNING/SQL튜닝_Ch14_교안.pptx
@@ -10588,7 +10588,7 @@
                 </a:solidFill>
                 <a:latin typeface="Consolas"/>
               </a:rPr>
-              <a:t>| Id | Operation         | Name           | A-Rows |   A-Time   | Buffers | Reads |</a:t>
+              <a:t>| Id | Operation                           | Name              | A-Rows |   A-Time   | Buffers | Reads |</a:t>
             </a:r>
           </a:p>
           <a:p>
@@ -10599,7 +10599,7 @@
                 </a:solidFill>
                 <a:latin typeface="Consolas"/>
               </a:rPr>
-              <a:t>| 0  | SELECT STATEMENT  |                |    804 |00:00:03.46 |    3144 |  3085 |</a:t>
+              <a:t>| 0  | SELECT STATEMENT                    |                   |    804 |00:00:00.01 |     787 |   785 |</a:t>
             </a:r>
           </a:p>
           <a:p>
@@ -10610,7 +10610,7 @@
                 </a:solidFill>
                 <a:latin typeface="Consolas"/>
               </a:rPr>
-              <a:t>| 1  |  TABLE ACCESS FULL| MEDICAL_CLAIMS |    804 |00:00:03.46 |    3144 |  3085 |</a:t>
+              <a:t>| 1  |  TABLE ACCESS BY INDEX ROWID BATCHED| MEDICAL_CLAIMS    |    804 |00:00:00.01 |     787 |   785 |</a:t>
             </a:r>
           </a:p>
           <a:p>
@@ -10621,6 +10621,17 @@
                 </a:solidFill>
                 <a:latin typeface="Consolas"/>
               </a:rPr>
+              <a:t>| 2  |   INDEX RANGE SCAN                  | PK_MEDICAL_CLAIMS |    804 |00:00:00.01 |      61 |    64 |</a:t>
+            </a:r>
+          </a:p>
+          <a:p>
+            <a:r>
+              <a:rPr sz="1250" b="0">
+                <a:solidFill>
+                  <a:srgbClr val="E6E6E6"/>
+                </a:solidFill>
+                <a:latin typeface="Consolas"/>
+              </a:rPr>
               <a:t> </a:t>
             </a:r>
           </a:p>
@@ -10643,7 +10654,7 @@
                 </a:solidFill>
                 <a:latin typeface="Consolas"/>
               </a:rPr>
-              <a:t>-- 요청한 블록 대부분을 디스크에서 읽어와야 했다</a:t>
+              <a:t>-- 요청한 블록 787 중 785 를 디스크에서 읽어와야 했다</a:t>
             </a:r>
           </a:p>
           <a:p>
@@ -10654,7 +10665,7 @@
                 </a:solidFill>
                 <a:latin typeface="Consolas"/>
               </a:rPr>
-              <a:t>-- A-Time 00:00:03.46 : 디스크 접근 비용이 그대로 시간에 반영된 값</a:t>
+              <a:t>-- A-Time 00:00:00.01 : 이 VM 은 SSD 위라 785 블록 물리 읽기가 10ms 안에 끝났다(회전 디스크면 수 초)</a:t>
             </a:r>
           </a:p>
         </p:txBody>
@@ -10870,7 +10881,7 @@
                 </a:solidFill>
                 <a:latin typeface="Consolas"/>
               </a:rPr>
-              <a:t>| Id | Operation         | Name           | A-Rows |   A-Time   | Buffers |</a:t>
+              <a:t>| Id | Operation                           | Name              | A-Rows |   A-Time   | Buffers |</a:t>
             </a:r>
           </a:p>
           <a:p>
@@ -10881,7 +10892,7 @@
                 </a:solidFill>
                 <a:latin typeface="Consolas"/>
               </a:rPr>
-              <a:t>| 0  | SELECT STATEMENT  |                |    804 |00:00:00.01 |    3144 |</a:t>
+              <a:t>| 0  | SELECT STATEMENT                    |                   |    804 |00:00:00.01 |     776 |</a:t>
             </a:r>
           </a:p>
           <a:p>
@@ -10892,7 +10903,7 @@
                 </a:solidFill>
                 <a:latin typeface="Consolas"/>
               </a:rPr>
-              <a:t>| 1  |  TABLE ACCESS FULL| MEDICAL_CLAIMS |    804 |00:00:00.01 |    3144 |</a:t>
+              <a:t>| 1  |  TABLE ACCESS BY INDEX ROWID BATCHED| MEDICAL_CLAIMS    |    804 |00:00:00.01 |     776 |</a:t>
             </a:r>
           </a:p>
           <a:p>
@@ -10903,6 +10914,17 @@
                 </a:solidFill>
                 <a:latin typeface="Consolas"/>
               </a:rPr>
+              <a:t>| 2  |   INDEX RANGE SCAN                  | PK_MEDICAL_CLAIMS |    804 |00:00:00.01 |      61 |</a:t>
+            </a:r>
+          </a:p>
+          <a:p>
+            <a:r>
+              <a:rPr sz="1250" b="0">
+                <a:solidFill>
+                  <a:srgbClr val="E6E6E6"/>
+                </a:solidFill>
+                <a:latin typeface="Consolas"/>
+              </a:rPr>
               <a:t> </a:t>
             </a:r>
           </a:p>
@@ -10936,7 +10958,7 @@
                 </a:solidFill>
                 <a:latin typeface="Consolas"/>
               </a:rPr>
-              <a:t>-- Buffers 3144 : 콜드 캐시와 완전히 동일하다</a:t>
+              <a:t>-- Buffers 776 : 콜드 캐시(787)와 사실상 동일하다 — 차이 11 은 물리 읽기 때 더 요청한 헤더 블록</a:t>
             </a:r>
           </a:p>
           <a:p>
@@ -11085,7 +11107,7 @@
                 </a:solidFill>
                 <a:latin typeface="Malgun Gothic"/>
               </a:rPr>
-              <a:t>•  Buffers는 3,144로 완전히 동일했다</a:t>
+              <a:t>•  Buffers는 787 → 776 으로 사실상 동일했다</a:t>
             </a:r>
           </a:p>
           <a:p>
@@ -11118,7 +11140,7 @@
                 </a:solidFill>
                 <a:latin typeface="Malgun Gothic"/>
               </a:rPr>
-              <a:t>•  Reads는 3,085에서 컬럼 자체가 사라지는 상태로 바뀌었다</a:t>
+              <a:t>•  Reads는 785에서 컬럼 자체가 사라지는 상태로 바뀌었다</a:t>
             </a:r>
           </a:p>
           <a:p>
@@ -11151,7 +11173,7 @@
                 </a:solidFill>
                 <a:latin typeface="Malgun Gothic"/>
               </a:rPr>
-              <a:t>•  A-Time은 3.46초에서 0.01초로, 약 346배 차이가 났다</a:t>
+              <a:t>•  A-Time은 둘 다 0.01초 — SSD 라 차이가 안 보이지만 회전 디스크면 수백 배가 되는 자리</a:t>
             </a:r>
           </a:p>
           <a:p>
@@ -11162,7 +11184,7 @@
                 </a:solidFill>
                 <a:latin typeface="Malgun Gothic"/>
               </a:rPr>
-              <a:t>    –  디스크 I/O가 메모리 접근보다 압도적으로 느리다는 사실이 시간 차이로 드러난 것</a:t>
+              <a:t>    –  물리 읽기 한 건의 비용은 저장 장치가 정한다 — 그래서 시간이 아니라 Reads 로 판정한다</a:t>
             </a:r>
           </a:p>
           <a:p>
@@ -11322,7 +11344,7 @@
                 </a:solidFill>
                 <a:latin typeface="Malgun Gothic"/>
               </a:rPr>
-              <a:t>    –  Buffers 3,144 / Reads 3,085 — 차이는 59</a:t>
+              <a:t>    –  Buffers 787 / Reads 785 — 요청 단위와 읽기 단위가 다르다(선읽기, 캐시된 루트·브랜치)</a:t>
             </a:r>
           </a:p>
           <a:p>
@@ -11946,7 +11968,7 @@
                 </a:solidFill>
                 <a:latin typeface="Malgun Gothic"/>
               </a:rPr>
-              <a:t>•  이 실험에서 Buffers는 콜드든 웜이든 3,144로 완전히 동일했다</a:t>
+              <a:t>•  이 실험에서 Buffers는 콜드든 웜이든 780 안팎으로 사실상 동일했다</a:t>
             </a:r>
           </a:p>
           <a:p>
@@ -11979,7 +12001,7 @@
                 </a:solidFill>
                 <a:latin typeface="Malgun Gothic"/>
               </a:rPr>
-              <a:t>    –  약 346배에 달하는 실제 체감 속도 차이를 완전히 놓쳤을 것이다</a:t>
+              <a:t>    –  785 블록의 물리 읽기(느린 저장 장치에서는 수 초)를 완전히 놓쳤을 것이다</a:t>
             </a:r>
           </a:p>
           <a:p>
@@ -13370,7 +13392,7 @@
                 </a:solidFill>
                 <a:latin typeface="Consolas"/>
               </a:rPr>
-              <a:t>| 콜드 캐시(첫 실행) |     3,144 |         3,085 |   3.46초 |</a:t>
+              <a:t>| 콜드 캐시(첫 실행) |       787 |           785 |   0.01초 |</a:t>
             </a:r>
           </a:p>
           <a:p>
@@ -13381,7 +13403,7 @@
                 </a:solidFill>
                 <a:latin typeface="Consolas"/>
               </a:rPr>
-              <a:t>| 웜 캐시(재실행)    |     3,144 | 0(표시 안 됨) |   0.01초 |</a:t>
+              <a:t>| 웜 캐시(재실행)    |       776 | 0(표시 안 됨) |   0.01초 |</a:t>
             </a:r>
           </a:p>
           <a:p>
@@ -13392,7 +13414,7 @@
                 </a:solidFill>
                 <a:latin typeface="Consolas"/>
               </a:rPr>
-              <a:t>| 배율               | 1배(동일) |             - | 약 346배 |</a:t>
+              <a:t>| 배율               | 1배(동일) |      785 → 0  | SSD 라 동일 |</a:t>
             </a:r>
           </a:p>
           <a:p>
@@ -14590,7 +14612,7 @@
                 </a:solidFill>
                 <a:latin typeface="Malgun Gothic"/>
               </a:rPr>
-              <a:t>    –  이번 실측은 3,144라는 동일한 Buffers에서 3.46초와 0.01초, 약 346배 차이를 보였다</a:t>
+              <a:t>    –  이번 실측은 780 안팎의 같은 Buffers에서 Reads 785 → 0 의 차이를 보였다(시간 차는 저장 장치가 정한다)</a:t>
             </a:r>
           </a:p>
           <a:p>
